--- a/docs/factorio_user_guide_2026-07-06_ru.pptx
+++ b/docs/factorio_user_guide_2026-07-06_ru.pptx
@@ -21,6 +21,9 @@
     <p:sldId id="269" r:id="rId20"/>
     <p:sldId id="270" r:id="rId21"/>
     <p:sldId id="271" r:id="rId22"/>
+    <p:sldId id="272" r:id="rId23"/>
+    <p:sldId id="273" r:id="rId24"/>
+    <p:sldId id="274" r:id="rId25"/>
   </p:sldIdLst>
   <p:sldSz cx="12191695" cy="6858000" type="screen4x3"/>
   <p:notesSz cx="6858000" cy="9144000"/>
@@ -3290,7 +3293,7 @@
                   <a:srgbClr val="C8A24B"/>
                 </a:solidFill>
               </a:rPr>
-              <a:t>ПРИЛОЖЕНИЕ · ДЕТАЛИ СЧЁТА</a:t>
+              <a:t>КОНТАКТЫ</a:t>
             </a:r>
           </a:p>
         </p:txBody>
@@ -3342,7 +3345,7 @@
                   <a:srgbClr val="FFFFFF"/>
                 </a:solidFill>
               </a:rPr>
-              <a:t>   Полная прозрачность перед инвестицией</a:t>
+              <a:t>   Связаться с нами</a:t>
             </a:r>
           </a:p>
         </p:txBody>
@@ -3380,7 +3383,7 @@
                   <a:srgbClr val="14231B"/>
                 </a:solidFill>
               </a:rPr>
-              <a:t>•  В заголовке — должник, рейтинг риска, отрасль и номер счёта.</a:t>
+              <a:t>•  Страница контактов для продавцов и инвесторов, чтобы связаться с командой Factorio.</a:t>
             </a:r>
           </a:p>
           <a:p>
@@ -3395,7 +3398,7 @@
                   <a:srgbClr val="14231B"/>
                 </a:solidFill>
               </a:rPr>
-              <a:t>•  Панель финансирования: собрано против цели, ставка аванса, комиссия и ожидаемая доходность.</a:t>
+              <a:t>•  Показаны контактный e-mail и простая форма обращения.</a:t>
             </a:r>
           </a:p>
           <a:p>
@@ -3410,29 +3413,14 @@
                   <a:srgbClr val="14231B"/>
                 </a:solidFill>
               </a:rPr>
-              <a:t>•  Блок профиля компании-должника: регистрационный номер, отрасль, страна и годовой оборот.</a:t>
-            </a:r>
-          </a:p>
-          <a:p>
-            <a:pPr>
-              <a:spcAft>
-                <a:spcPts val="1000"/>
-              </a:spcAft>
-            </a:pPr>
-            <a:r>
-              <a:rPr sz="1500">
-                <a:solidFill>
-                  <a:srgbClr val="14231B"/>
-                </a:solidFill>
-              </a:rPr>
-              <a:t>•  Всё необходимое для решения о финансировании на одном экране.</a:t>
+              <a:t>•  Точка входа для начала подключения.</a:t>
             </a:r>
           </a:p>
         </p:txBody>
       </p:sp>
       <p:pic>
         <p:nvPicPr>
-          <p:cNvPr id="6" name="Picture 5" descr="ru-09-marketplace-detail.png"/>
+          <p:cNvPr id="6" name="Picture 5" descr="ru-06-contact.png"/>
           <p:cNvPicPr>
             <a:picLocks noChangeAspect="1"/>
           </p:cNvPicPr>
@@ -3544,7 +3532,7 @@
                   <a:srgbClr val="C8A24B"/>
                 </a:solidFill>
               </a:rPr>
-              <a:t>ПРИЛОЖЕНИЕ · ПОРТФЕЛЬ</a:t>
+              <a:t>ПРИЛОЖЕНИЕ · ДАШБОРД</a:t>
             </a:r>
           </a:p>
         </p:txBody>
@@ -3596,7 +3584,7 @@
                   <a:srgbClr val="FFFFFF"/>
                 </a:solidFill>
               </a:rPr>
-              <a:t>   Аналитическая панель</a:t>
+              <a:t>   Ваш персональный обзор</a:t>
             </a:r>
           </a:p>
         </p:txBody>
@@ -3634,7 +3622,7 @@
                   <a:srgbClr val="14231B"/>
                 </a:solidFill>
               </a:rPr>
-              <a:t>•  Две главные панели: чистая годовая доходность (полученные проценты, списания, чистый доход) и стоимость счёта (активные вложения, ожидаемое к получению, реализованное).</a:t>
+              <a:t>•  Главная /app приветствует текущего инвестора и показывает его KPI: стоимость портфеля, чистую годовую доходность, заработанное и ближайший расчёт.</a:t>
             </a:r>
           </a:p>
           <a:p>
@@ -3649,7 +3637,7 @@
                   <a:srgbClr val="14231B"/>
                 </a:solidFill>
               </a:rPr>
-              <a:t>•  Таблица старения вложений распределяет активные позиции по сроку до / после погашения.</a:t>
+              <a:t>•  Лента активности отражает уведомления — финансирования, расчёты и обновления.</a:t>
             </a:r>
           </a:p>
           <a:p>
@@ -3664,7 +3652,7 @@
                   <a:srgbClr val="14231B"/>
                 </a:solidFill>
               </a:rPr>
-              <a:t>•  Таблица платёжной дисциплины показывает, как фактически платили по закрытым счетам — раньше, в срок, с опозданием или списание.</a:t>
+              <a:t>•  Быстрые действия ведут в маркетплейс, портфель и выписку.</a:t>
             </a:r>
           </a:p>
           <a:p>
@@ -3679,14 +3667,29 @@
                   <a:srgbClr val="14231B"/>
                 </a:solidFill>
               </a:rPr>
-              <a:t>•  Таблица позиций перечисляет каждую инвестицию с реализованным доходом, датой расчёта, рейтингом и статусом.</a:t>
+              <a:t>•  Общая статистика платформы вынесена во вторичную полосу.</a:t>
+            </a:r>
+          </a:p>
+          <a:p>
+            <a:pPr>
+              <a:spcAft>
+                <a:spcPts val="1000"/>
+              </a:spcAft>
+            </a:pPr>
+            <a:r>
+              <a:rPr sz="1500">
+                <a:solidFill>
+                  <a:srgbClr val="14231B"/>
+                </a:solidFill>
+              </a:rPr>
+              <a:t>•  Переключатель инвестора справа вверху позволяет смотреть приложение от лица любого инвестора (демо, без пароля).</a:t>
             </a:r>
           </a:p>
         </p:txBody>
       </p:sp>
       <p:pic>
         <p:nvPicPr>
-          <p:cNvPr id="6" name="Picture 5" descr="ru-10-portfolio.png"/>
+          <p:cNvPr id="6" name="Picture 5" descr="ru-07-dashboard.png"/>
           <p:cNvPicPr>
             <a:picLocks noChangeAspect="1"/>
           </p:cNvPicPr>
@@ -3798,7 +3801,7 @@
                   <a:srgbClr val="C8A24B"/>
                 </a:solidFill>
               </a:rPr>
-              <a:t>ПРИЛОЖЕНИЕ · ВЫПИСКА ПО СЧЁТУ</a:t>
+              <a:t>ПРИЛОЖЕНИЕ · МАРКЕТПЛЕЙС</a:t>
             </a:r>
           </a:p>
         </p:txBody>
@@ -3850,7 +3853,7 @@
                   <a:srgbClr val="FFFFFF"/>
                 </a:solidFill>
               </a:rPr>
-              <a:t>   Каждая операция, с фильтрами</a:t>
+              <a:t>   Просмотр счетов для финансирования</a:t>
             </a:r>
           </a:p>
         </p:txBody>
@@ -3888,7 +3891,7 @@
                   <a:srgbClr val="14231B"/>
                 </a:solidFill>
               </a:rPr>
-              <a:t>•  Единый реестр движения средств: вложения (−) и поступления по расчётам (+).</a:t>
+              <a:t>•  Каждый открытый счёт — это карточка: должник, отрасль, рейтинг риска, сумма и шкала прогресса финансирования.</a:t>
             </a:r>
           </a:p>
           <a:p>
@@ -3903,7 +3906,7 @@
                   <a:srgbClr val="14231B"/>
                 </a:solidFill>
               </a:rPr>
-              <a:t>•  Фильтрация по периоду, типу, контрагенту, номеру счёта и минимальной сумме.</a:t>
+              <a:t>•  На карточке видны ключевые показатели — ставка аванса, комиссия за 30 дней и ожидаемая доходность — а также срок удержания в днях.</a:t>
             </a:r>
           </a:p>
           <a:p>
@@ -3918,7 +3921,7 @@
                   <a:srgbClr val="14231B"/>
                 </a:solidFill>
               </a:rPr>
-              <a:t>•  Суммы со знаком в UZS, новые сверху.</a:t>
+              <a:t>•  Панель фильтров сужает выбор по отрасли, рейтингу риска, максимальному сроку и минимальной доходности.</a:t>
             </a:r>
           </a:p>
           <a:p>
@@ -3933,14 +3936,14 @@
                   <a:srgbClr val="14231B"/>
                 </a:solidFill>
               </a:rPr>
-              <a:t>•  Экспорт в CSV в один клик для учёта и сверки.</a:t>
+              <a:t>•  Нажмите на карточку, чтобы открыть подробности счёта.</a:t>
             </a:r>
           </a:p>
         </p:txBody>
       </p:sp>
       <p:pic>
         <p:nvPicPr>
-          <p:cNvPr id="6" name="Picture 5" descr="ru-11-statement.png"/>
+          <p:cNvPr id="6" name="Picture 5" descr="ru-08-marketplace.png"/>
           <p:cNvPicPr>
             <a:picLocks noChangeAspect="1"/>
           </p:cNvPicPr>
@@ -4052,7 +4055,7 @@
                   <a:srgbClr val="C8A24B"/>
                 </a:solidFill>
               </a:rPr>
-              <a:t>ПРИЛОЖЕНИЕ · АВТО-ИНВЕСТИРОВАНИЕ</a:t>
+              <a:t>ПРИЛОЖЕНИЕ · ДЕТАЛИ СЧЁТА</a:t>
             </a:r>
           </a:p>
         </p:txBody>
@@ -4104,7 +4107,7 @@
                   <a:srgbClr val="FFFFFF"/>
                 </a:solidFill>
               </a:rPr>
-              <a:t>   Задайте правила — инвестируйте автоматически</a:t>
+              <a:t>   Полная прозрачность перед инвестицией</a:t>
             </a:r>
           </a:p>
         </p:txBody>
@@ -4142,7 +4145,7 @@
                   <a:srgbClr val="14231B"/>
                 </a:solidFill>
               </a:rPr>
-              <a:t>•  Настройте автоматические заявки: минимальный рейтинг риска, максимальную сумму на счёт и предпочитаемые отрасли.</a:t>
+              <a:t>•  В заголовке — должник, рейтинг риска, отрасль и номер счёта.</a:t>
             </a:r>
           </a:p>
           <a:p>
@@ -4157,7 +4160,7 @@
                   <a:srgbClr val="14231B"/>
                 </a:solidFill>
               </a:rPr>
-              <a:t>•  Включайте и выключайте стратегию; статус показан сверху.</a:t>
+              <a:t>•  Панель финансирования: собрано против цели, ставка аванса, комиссия и ожидаемая доходность.</a:t>
             </a:r>
           </a:p>
           <a:p>
@@ -4172,7 +4175,7 @@
                   <a:srgbClr val="14231B"/>
                 </a:solidFill>
               </a:rPr>
-              <a:t>•  Правила сохраняются для каждого инвестора и применяются к подходящим новым счетам.</a:t>
+              <a:t>•  Блок профиля компании-должника: регистрационный номер, отрасль, страна и годовой оборот.</a:t>
             </a:r>
           </a:p>
           <a:p>
@@ -4187,14 +4190,14 @@
                   <a:srgbClr val="14231B"/>
                 </a:solidFill>
               </a:rPr>
-              <a:t>•  Создано по образцу автобиддера investly.co.</a:t>
+              <a:t>•  Всё необходимое для решения о финансировании на одном экране.</a:t>
             </a:r>
           </a:p>
         </p:txBody>
       </p:sp>
       <p:pic>
         <p:nvPicPr>
-          <p:cNvPr id="6" name="Picture 5" descr="ru-12-auto-invest.png"/>
+          <p:cNvPr id="6" name="Picture 5" descr="ru-09-marketplace-detail.png"/>
           <p:cNvPicPr>
             <a:picLocks noChangeAspect="1"/>
           </p:cNvPicPr>
@@ -4306,7 +4309,7 @@
                   <a:srgbClr val="C8A24B"/>
                 </a:solidFill>
               </a:rPr>
-              <a:t>AI · ТРИАЖ ЗАЯВОК</a:t>
+              <a:t>ПРИЛОЖЕНИЕ · ПОРТФЕЛЬ</a:t>
             </a:r>
           </a:p>
         </p:txBody>
@@ -4358,7 +4361,7 @@
                   <a:srgbClr val="FFFFFF"/>
                 </a:solidFill>
               </a:rPr>
-              <a:t>   Триаж счёта в чате</a:t>
+              <a:t>   Аналитическая панель</a:t>
             </a:r>
           </a:p>
         </p:txBody>
@@ -4396,7 +4399,7 @@
                   <a:srgbClr val="14231B"/>
                 </a:solidFill>
               </a:rPr>
-              <a:t>•  Продавцы описывают счёт и должника обычными словами; ассистент запрашивает только недостающее.</a:t>
+              <a:t>•  Две главные панели: чистая годовая доходность (полученные проценты, списания, чистый доход) и стоимость счёта (активные вложения, ожидаемое к получению, реализованное).</a:t>
             </a:r>
           </a:p>
           <a:p>
@@ -4411,7 +4414,7 @@
                   <a:srgbClr val="14231B"/>
                 </a:solidFill>
               </a:rPr>
-              <a:t>•  Он возвращает индикативный уровень риска (A–D), ставку аванса и список документов для банка — за секунды, а не за дни.</a:t>
+              <a:t>•  Таблица старения вложений распределяет активные позиции по сроку до / после погашения.</a:t>
             </a:r>
           </a:p>
           <a:p>
@@ -4426,7 +4429,7 @@
                   <a:srgbClr val="14231B"/>
                 </a:solidFill>
               </a:rPr>
-              <a:t>•  На базе Grok (x.ai); все данные индикативны и подлежат проверке — окончательное решение не автоматизируется.</a:t>
+              <a:t>•  Таблица платёжной дисциплины показывает, как фактически платили по закрытым счетам — раньше, в срок, с опозданием или списание.</a:t>
             </a:r>
           </a:p>
           <a:p>
@@ -4441,14 +4444,14 @@
                   <a:srgbClr val="14231B"/>
                 </a:solidFill>
               </a:rPr>
-              <a:t>•  Полностью трёхъязычный — ассистент отвечает на языке посетителя (английский, узбекский, русский).</a:t>
+              <a:t>•  Таблица позиций перечисляет каждую инвестицию с реализованным доходом, датой расчёта, рейтингом и статусом.</a:t>
             </a:r>
           </a:p>
         </p:txBody>
       </p:sp>
       <p:pic>
         <p:nvPicPr>
-          <p:cNvPr id="6" name="Picture 5" descr="ru-13-ai-triage.png"/>
+          <p:cNvPr id="6" name="Picture 5" descr="ru-10-portfolio.png"/>
           <p:cNvPicPr>
             <a:picLocks noChangeAspect="1"/>
           </p:cNvPicPr>
@@ -4560,7 +4563,7 @@
                   <a:srgbClr val="C8A24B"/>
                 </a:solidFill>
               </a:rPr>
-              <a:t>AI · ОТЧЁТЫ ПО ПОРТФЕЛЮ</a:t>
+              <a:t>ПРИЛОЖЕНИЕ · ВЫПИСКА ПО СЧЁТУ</a:t>
             </a:r>
           </a:p>
         </p:txBody>
@@ -4612,7 +4615,7 @@
                   <a:srgbClr val="FFFFFF"/>
                 </a:solidFill>
               </a:rPr>
-              <a:t>   Спросите свой портфель о чём угодно</a:t>
+              <a:t>   Каждая операция, с фильтрами</a:t>
             </a:r>
           </a:p>
         </p:txBody>
@@ -4650,7 +4653,7 @@
                   <a:srgbClr val="14231B"/>
                 </a:solidFill>
               </a:rPr>
-              <a:t>•  Инвесторы задают вопросы на естественном языке — чистая доходность, доля по отраслям или должникам, просроченные позиции, ближайшие расчёты.</a:t>
+              <a:t>•  Единый реестр движения средств: вложения (−) и поступления по расчётам (+).</a:t>
             </a:r>
           </a:p>
           <a:p>
@@ -4665,7 +4668,7 @@
                   <a:srgbClr val="14231B"/>
                 </a:solidFill>
               </a:rPr>
-              <a:t>•  Ответы основаны на реальных позициях инвестора — каждая цифра восходит к данным портфеля, а не выдумана.</a:t>
+              <a:t>•  Фильтрация по периоду, типу, контрагенту, номеру счёта и минимальной сумме.</a:t>
             </a:r>
           </a:p>
           <a:p>
@@ -4680,7 +4683,7 @@
                   <a:srgbClr val="14231B"/>
                 </a:solidFill>
               </a:rPr>
-              <a:t>•  Конкретно и точно: приводятся реальные суммы и номера счетов, а при нехватке данных об этом честно сообщается.</a:t>
+              <a:t>•  Суммы со знаком в UZS, новые сверху.</a:t>
             </a:r>
           </a:p>
           <a:p>
@@ -4695,14 +4698,14 @@
                   <a:srgbClr val="14231B"/>
                 </a:solidFill>
               </a:rPr>
-              <a:t>•  Разговорный слой поверх аналитической панели портфеля — отчётность по запросу, на языке инвестора.</a:t>
+              <a:t>•  Экспорт в CSV в один клик для учёта и сверки.</a:t>
             </a:r>
           </a:p>
         </p:txBody>
       </p:sp>
       <p:pic>
         <p:nvPicPr>
-          <p:cNvPr id="6" name="Picture 5" descr="ru-14-ai-assistant.png"/>
+          <p:cNvPr id="6" name="Picture 5" descr="ru-11-statement.png"/>
           <p:cNvPicPr>
             <a:picLocks noChangeAspect="1"/>
           </p:cNvPicPr>
@@ -4814,7 +4817,7 @@
                   <a:srgbClr val="C8A24B"/>
                 </a:solidFill>
               </a:rPr>
-              <a:t>НАЧАЛО РАБОТЫ</a:t>
+              <a:t>ПРИЛОЖЕНИЕ · АВТО-ИНВЕСТИРОВАНИЕ</a:t>
             </a:r>
           </a:p>
         </p:txBody>
@@ -4866,7 +4869,7 @@
                   <a:srgbClr val="FFFFFF"/>
                 </a:solidFill>
               </a:rPr>
-              <a:t>   Начните с Factorio</a:t>
+              <a:t>   Задайте правила — инвестируйте автоматически</a:t>
             </a:r>
           </a:p>
         </p:txBody>
@@ -4880,7 +4883,7 @@
         <p:spPr>
           <a:xfrm>
             <a:off x="640080" y="1828800"/>
-            <a:ext cx="10881360" cy="4572000"/>
+            <a:ext cx="5120640" cy="4572000"/>
           </a:xfrm>
           <a:prstGeom prst="rect">
             <a:avLst/>
@@ -4904,7 +4907,7 @@
                   <a:srgbClr val="14231B"/>
                 </a:solidFill>
               </a:rPr>
-              <a:t>•  Продавцам — подайте счёт и получите предложение за 1–3 рабочих дня.</a:t>
+              <a:t>•  Настройте автоматические заявки: минимальный рейтинг риска, максимальную сумму на счёт и предпочитаемые отрасли.</a:t>
             </a:r>
           </a:p>
           <a:p>
@@ -4919,7 +4922,7 @@
                   <a:srgbClr val="14231B"/>
                 </a:solidFill>
               </a:rPr>
-              <a:t>•  Инвесторам — изучайте маркетплейс, формируйте портфель, автоматизируйте через авто-инвестирование.</a:t>
+              <a:t>•  Включайте и выключайте стратегию; статус показан сверху.</a:t>
             </a:r>
           </a:p>
           <a:p>
@@ -4934,7 +4937,769 @@
                   <a:srgbClr val="14231B"/>
                 </a:solidFill>
               </a:rPr>
-              <a:t>•  Доступно на factorio.co.uk · hello@factorio.io</a:t>
+              <a:t>•  Правила сохраняются для каждого инвестора и применяются к подходящим новым счетам.</a:t>
+            </a:r>
+          </a:p>
+          <a:p>
+            <a:pPr>
+              <a:spcAft>
+                <a:spcPts val="1000"/>
+              </a:spcAft>
+            </a:pPr>
+            <a:r>
+              <a:rPr sz="1500">
+                <a:solidFill>
+                  <a:srgbClr val="14231B"/>
+                </a:solidFill>
+              </a:rPr>
+              <a:t>•  Создано по образцу автобиддера investly.co.</a:t>
+            </a:r>
+          </a:p>
+        </p:txBody>
+      </p:sp>
+      <p:pic>
+        <p:nvPicPr>
+          <p:cNvPr id="6" name="Picture 5" descr="ru-12-auto-invest.png"/>
+          <p:cNvPicPr>
+            <a:picLocks noChangeAspect="1"/>
+          </p:cNvPicPr>
+          <p:nvPr/>
+        </p:nvPicPr>
+        <p:blipFill>
+          <a:blip r:embed="rId2"/>
+          <a:stretch>
+            <a:fillRect/>
+          </a:stretch>
+        </p:blipFill>
+        <p:spPr>
+          <a:xfrm>
+            <a:off x="5943600" y="1828800"/>
+            <a:ext cx="5760720" cy="3600450"/>
+          </a:xfrm>
+          <a:prstGeom prst="rect">
+            <a:avLst/>
+          </a:prstGeom>
+        </p:spPr>
+      </p:pic>
+    </p:spTree>
+  </p:cSld>
+  <p:clrMapOvr>
+    <a:masterClrMapping/>
+  </p:clrMapOvr>
+</p:sld>
+</file>
+
+<file path=ppt/slides/slide17.xml><?xml version="1.0" encoding="utf-8"?>
+<p:sld xmlns:a="http://schemas.openxmlformats.org/drawingml/2006/main" xmlns:p="http://schemas.openxmlformats.org/presentationml/2006/main" xmlns:r="http://schemas.openxmlformats.org/officeDocument/2006/relationships">
+  <p:cSld>
+    <p:spTree>
+      <p:nvGrpSpPr>
+        <p:cNvPr id="1" name=""/>
+        <p:cNvGrpSpPr/>
+        <p:nvPr/>
+      </p:nvGrpSpPr>
+      <p:grpSpPr/>
+      <p:sp>
+        <p:nvSpPr>
+          <p:cNvPr id="2" name="Rectangle 1"/>
+          <p:cNvSpPr/>
+          <p:nvPr/>
+        </p:nvSpPr>
+        <p:spPr>
+          <a:xfrm>
+            <a:off x="0" y="0"/>
+            <a:ext cx="12191695" cy="6858000"/>
+          </a:xfrm>
+          <a:prstGeom prst="rect">
+            <a:avLst/>
+          </a:prstGeom>
+          <a:solidFill>
+            <a:srgbClr val="F7F6F1"/>
+          </a:solidFill>
+          <a:ln>
+            <a:noFill/>
+          </a:ln>
+          <a:effectLst/>
+        </p:spPr>
+        <p:style>
+          <a:lnRef idx="1">
+            <a:schemeClr val="accent1"/>
+          </a:lnRef>
+          <a:fillRef idx="3">
+            <a:schemeClr val="accent1"/>
+          </a:fillRef>
+          <a:effectRef idx="2">
+            <a:schemeClr val="accent1"/>
+          </a:effectRef>
+          <a:fontRef idx="minor">
+            <a:schemeClr val="lt1"/>
+          </a:fontRef>
+        </p:style>
+        <p:txBody>
+          <a:bodyPr rtlCol="0" anchor="ctr"/>
+          <a:lstStyle/>
+          <a:p>
+            <a:pPr algn="ctr"/>
+          </a:p>
+        </p:txBody>
+      </p:sp>
+      <p:sp>
+        <p:nvSpPr>
+          <p:cNvPr id="3" name="TextBox 2"/>
+          <p:cNvSpPr txBox="1"/>
+          <p:nvPr/>
+        </p:nvSpPr>
+        <p:spPr>
+          <a:xfrm>
+            <a:off x="640080" y="365760"/>
+            <a:ext cx="10972800" cy="365760"/>
+          </a:xfrm>
+          <a:prstGeom prst="rect">
+            <a:avLst/>
+          </a:prstGeom>
+          <a:noFill/>
+        </p:spPr>
+        <p:txBody>
+          <a:bodyPr wrap="square">
+            <a:spAutoFit/>
+          </a:bodyPr>
+          <a:lstStyle/>
+          <a:p>
+            <a:r>
+              <a:rPr sz="1100" b="1">
+                <a:solidFill>
+                  <a:srgbClr val="C8A24B"/>
+                </a:solidFill>
+              </a:rPr>
+              <a:t>AI · ТРИАЖ ЗАЯВОК</a:t>
+            </a:r>
+          </a:p>
+        </p:txBody>
+      </p:sp>
+      <p:sp>
+        <p:nvSpPr>
+          <p:cNvPr id="4" name="Rectangle 3"/>
+          <p:cNvSpPr/>
+          <p:nvPr/>
+        </p:nvSpPr>
+        <p:spPr>
+          <a:xfrm>
+            <a:off x="640080" y="731520"/>
+            <a:ext cx="10881360" cy="777240"/>
+          </a:xfrm>
+          <a:prstGeom prst="rect">
+            <a:avLst/>
+          </a:prstGeom>
+          <a:solidFill>
+            <a:srgbClr val="1F5D43"/>
+          </a:solidFill>
+          <a:ln>
+            <a:noFill/>
+          </a:ln>
+          <a:effectLst/>
+        </p:spPr>
+        <p:style>
+          <a:lnRef idx="1">
+            <a:schemeClr val="accent1"/>
+          </a:lnRef>
+          <a:fillRef idx="3">
+            <a:schemeClr val="accent1"/>
+          </a:fillRef>
+          <a:effectRef idx="2">
+            <a:schemeClr val="accent1"/>
+          </a:effectRef>
+          <a:fontRef idx="minor">
+            <a:schemeClr val="lt1"/>
+          </a:fontRef>
+        </p:style>
+        <p:txBody>
+          <a:bodyPr rtlCol="0" anchor="ctr" wrap="square"/>
+          <a:lstStyle/>
+          <a:p>
+            <a:pPr algn="l"/>
+            <a:r>
+              <a:rPr sz="2200" b="1">
+                <a:solidFill>
+                  <a:srgbClr val="FFFFFF"/>
+                </a:solidFill>
+              </a:rPr>
+              <a:t>   Триаж счёта в чате</a:t>
+            </a:r>
+          </a:p>
+        </p:txBody>
+      </p:sp>
+      <p:sp>
+        <p:nvSpPr>
+          <p:cNvPr id="5" name="TextBox 4"/>
+          <p:cNvSpPr txBox="1"/>
+          <p:nvPr/>
+        </p:nvSpPr>
+        <p:spPr>
+          <a:xfrm>
+            <a:off x="640080" y="1828800"/>
+            <a:ext cx="5120640" cy="4572000"/>
+          </a:xfrm>
+          <a:prstGeom prst="rect">
+            <a:avLst/>
+          </a:prstGeom>
+          <a:noFill/>
+        </p:spPr>
+        <p:txBody>
+          <a:bodyPr wrap="square">
+            <a:spAutoFit/>
+          </a:bodyPr>
+          <a:lstStyle/>
+          <a:p>
+            <a:pPr>
+              <a:spcAft>
+                <a:spcPts val="1000"/>
+              </a:spcAft>
+            </a:pPr>
+            <a:r>
+              <a:rPr sz="1500">
+                <a:solidFill>
+                  <a:srgbClr val="14231B"/>
+                </a:solidFill>
+              </a:rPr>
+              <a:t>•  Продавцы описывают счёт и должника обычными словами; ассистент запрашивает только недостающее.</a:t>
+            </a:r>
+          </a:p>
+          <a:p>
+            <a:pPr>
+              <a:spcAft>
+                <a:spcPts val="1000"/>
+              </a:spcAft>
+            </a:pPr>
+            <a:r>
+              <a:rPr sz="1500">
+                <a:solidFill>
+                  <a:srgbClr val="14231B"/>
+                </a:solidFill>
+              </a:rPr>
+              <a:t>•  Он возвращает индикативный уровень риска (A–D), ставку аванса и список документов для банка — за секунды, а не за дни.</a:t>
+            </a:r>
+          </a:p>
+          <a:p>
+            <a:pPr>
+              <a:spcAft>
+                <a:spcPts val="1000"/>
+              </a:spcAft>
+            </a:pPr>
+            <a:r>
+              <a:rPr sz="1500">
+                <a:solidFill>
+                  <a:srgbClr val="14231B"/>
+                </a:solidFill>
+              </a:rPr>
+              <a:t>•  На базе Grok (x.ai); все данные индикативны и подлежат проверке — окончательное решение не автоматизируется.</a:t>
+            </a:r>
+          </a:p>
+          <a:p>
+            <a:pPr>
+              <a:spcAft>
+                <a:spcPts val="1000"/>
+              </a:spcAft>
+            </a:pPr>
+            <a:r>
+              <a:rPr sz="1500">
+                <a:solidFill>
+                  <a:srgbClr val="14231B"/>
+                </a:solidFill>
+              </a:rPr>
+              <a:t>•  Полностью трёхъязычный — ассистент отвечает на языке посетителя (английский, узбекский, русский).</a:t>
+            </a:r>
+          </a:p>
+        </p:txBody>
+      </p:sp>
+      <p:pic>
+        <p:nvPicPr>
+          <p:cNvPr id="6" name="Picture 5" descr="ru-13-ai-triage.png"/>
+          <p:cNvPicPr>
+            <a:picLocks noChangeAspect="1"/>
+          </p:cNvPicPr>
+          <p:nvPr/>
+        </p:nvPicPr>
+        <p:blipFill>
+          <a:blip r:embed="rId2"/>
+          <a:stretch>
+            <a:fillRect/>
+          </a:stretch>
+        </p:blipFill>
+        <p:spPr>
+          <a:xfrm>
+            <a:off x="5943600" y="1828800"/>
+            <a:ext cx="5760720" cy="3600450"/>
+          </a:xfrm>
+          <a:prstGeom prst="rect">
+            <a:avLst/>
+          </a:prstGeom>
+        </p:spPr>
+      </p:pic>
+    </p:spTree>
+  </p:cSld>
+  <p:clrMapOvr>
+    <a:masterClrMapping/>
+  </p:clrMapOvr>
+</p:sld>
+</file>
+
+<file path=ppt/slides/slide18.xml><?xml version="1.0" encoding="utf-8"?>
+<p:sld xmlns:a="http://schemas.openxmlformats.org/drawingml/2006/main" xmlns:p="http://schemas.openxmlformats.org/presentationml/2006/main" xmlns:r="http://schemas.openxmlformats.org/officeDocument/2006/relationships">
+  <p:cSld>
+    <p:spTree>
+      <p:nvGrpSpPr>
+        <p:cNvPr id="1" name=""/>
+        <p:cNvGrpSpPr/>
+        <p:nvPr/>
+      </p:nvGrpSpPr>
+      <p:grpSpPr/>
+      <p:sp>
+        <p:nvSpPr>
+          <p:cNvPr id="2" name="Rectangle 1"/>
+          <p:cNvSpPr/>
+          <p:nvPr/>
+        </p:nvSpPr>
+        <p:spPr>
+          <a:xfrm>
+            <a:off x="0" y="0"/>
+            <a:ext cx="12191695" cy="6858000"/>
+          </a:xfrm>
+          <a:prstGeom prst="rect">
+            <a:avLst/>
+          </a:prstGeom>
+          <a:solidFill>
+            <a:srgbClr val="F7F6F1"/>
+          </a:solidFill>
+          <a:ln>
+            <a:noFill/>
+          </a:ln>
+          <a:effectLst/>
+        </p:spPr>
+        <p:style>
+          <a:lnRef idx="1">
+            <a:schemeClr val="accent1"/>
+          </a:lnRef>
+          <a:fillRef idx="3">
+            <a:schemeClr val="accent1"/>
+          </a:fillRef>
+          <a:effectRef idx="2">
+            <a:schemeClr val="accent1"/>
+          </a:effectRef>
+          <a:fontRef idx="minor">
+            <a:schemeClr val="lt1"/>
+          </a:fontRef>
+        </p:style>
+        <p:txBody>
+          <a:bodyPr rtlCol="0" anchor="ctr"/>
+          <a:lstStyle/>
+          <a:p>
+            <a:pPr algn="ctr"/>
+          </a:p>
+        </p:txBody>
+      </p:sp>
+      <p:sp>
+        <p:nvSpPr>
+          <p:cNvPr id="3" name="TextBox 2"/>
+          <p:cNvSpPr txBox="1"/>
+          <p:nvPr/>
+        </p:nvSpPr>
+        <p:spPr>
+          <a:xfrm>
+            <a:off x="640080" y="365760"/>
+            <a:ext cx="10972800" cy="365760"/>
+          </a:xfrm>
+          <a:prstGeom prst="rect">
+            <a:avLst/>
+          </a:prstGeom>
+          <a:noFill/>
+        </p:spPr>
+        <p:txBody>
+          <a:bodyPr wrap="square">
+            <a:spAutoFit/>
+          </a:bodyPr>
+          <a:lstStyle/>
+          <a:p>
+            <a:r>
+              <a:rPr sz="1100" b="1">
+                <a:solidFill>
+                  <a:srgbClr val="C8A24B"/>
+                </a:solidFill>
+              </a:rPr>
+              <a:t>AI · ОТЧЁТЫ ПО ПОРТФЕЛЮ</a:t>
+            </a:r>
+          </a:p>
+        </p:txBody>
+      </p:sp>
+      <p:sp>
+        <p:nvSpPr>
+          <p:cNvPr id="4" name="Rectangle 3"/>
+          <p:cNvSpPr/>
+          <p:nvPr/>
+        </p:nvSpPr>
+        <p:spPr>
+          <a:xfrm>
+            <a:off x="640080" y="731520"/>
+            <a:ext cx="10881360" cy="777240"/>
+          </a:xfrm>
+          <a:prstGeom prst="rect">
+            <a:avLst/>
+          </a:prstGeom>
+          <a:solidFill>
+            <a:srgbClr val="1F5D43"/>
+          </a:solidFill>
+          <a:ln>
+            <a:noFill/>
+          </a:ln>
+          <a:effectLst/>
+        </p:spPr>
+        <p:style>
+          <a:lnRef idx="1">
+            <a:schemeClr val="accent1"/>
+          </a:lnRef>
+          <a:fillRef idx="3">
+            <a:schemeClr val="accent1"/>
+          </a:fillRef>
+          <a:effectRef idx="2">
+            <a:schemeClr val="accent1"/>
+          </a:effectRef>
+          <a:fontRef idx="minor">
+            <a:schemeClr val="lt1"/>
+          </a:fontRef>
+        </p:style>
+        <p:txBody>
+          <a:bodyPr rtlCol="0" anchor="ctr" wrap="square"/>
+          <a:lstStyle/>
+          <a:p>
+            <a:pPr algn="l"/>
+            <a:r>
+              <a:rPr sz="2200" b="1">
+                <a:solidFill>
+                  <a:srgbClr val="FFFFFF"/>
+                </a:solidFill>
+              </a:rPr>
+              <a:t>   Спросите свой портфель о чём угодно</a:t>
+            </a:r>
+          </a:p>
+        </p:txBody>
+      </p:sp>
+      <p:sp>
+        <p:nvSpPr>
+          <p:cNvPr id="5" name="TextBox 4"/>
+          <p:cNvSpPr txBox="1"/>
+          <p:nvPr/>
+        </p:nvSpPr>
+        <p:spPr>
+          <a:xfrm>
+            <a:off x="640080" y="1828800"/>
+            <a:ext cx="5120640" cy="4572000"/>
+          </a:xfrm>
+          <a:prstGeom prst="rect">
+            <a:avLst/>
+          </a:prstGeom>
+          <a:noFill/>
+        </p:spPr>
+        <p:txBody>
+          <a:bodyPr wrap="square">
+            <a:spAutoFit/>
+          </a:bodyPr>
+          <a:lstStyle/>
+          <a:p>
+            <a:pPr>
+              <a:spcAft>
+                <a:spcPts val="1000"/>
+              </a:spcAft>
+            </a:pPr>
+            <a:r>
+              <a:rPr sz="1500">
+                <a:solidFill>
+                  <a:srgbClr val="14231B"/>
+                </a:solidFill>
+              </a:rPr>
+              <a:t>•  Инвесторы задают вопросы на естественном языке — чистая доходность, доля по отраслям или должникам, просроченные позиции, ближайшие расчёты.</a:t>
+            </a:r>
+          </a:p>
+          <a:p>
+            <a:pPr>
+              <a:spcAft>
+                <a:spcPts val="1000"/>
+              </a:spcAft>
+            </a:pPr>
+            <a:r>
+              <a:rPr sz="1500">
+                <a:solidFill>
+                  <a:srgbClr val="14231B"/>
+                </a:solidFill>
+              </a:rPr>
+              <a:t>•  Ответы основаны на реальных позициях инвестора — каждая цифра восходит к данным портфеля, а не выдумана.</a:t>
+            </a:r>
+          </a:p>
+          <a:p>
+            <a:pPr>
+              <a:spcAft>
+                <a:spcPts val="1000"/>
+              </a:spcAft>
+            </a:pPr>
+            <a:r>
+              <a:rPr sz="1500">
+                <a:solidFill>
+                  <a:srgbClr val="14231B"/>
+                </a:solidFill>
+              </a:rPr>
+              <a:t>•  Конкретно и точно: приводятся реальные суммы и номера счетов, а при нехватке данных об этом честно сообщается.</a:t>
+            </a:r>
+          </a:p>
+          <a:p>
+            <a:pPr>
+              <a:spcAft>
+                <a:spcPts val="1000"/>
+              </a:spcAft>
+            </a:pPr>
+            <a:r>
+              <a:rPr sz="1500">
+                <a:solidFill>
+                  <a:srgbClr val="14231B"/>
+                </a:solidFill>
+              </a:rPr>
+              <a:t>•  Разговорный слой поверх аналитической панели портфеля — отчётность по запросу, на языке инвестора.</a:t>
+            </a:r>
+          </a:p>
+        </p:txBody>
+      </p:sp>
+      <p:pic>
+        <p:nvPicPr>
+          <p:cNvPr id="6" name="Picture 5" descr="ru-14-ai-assistant.png"/>
+          <p:cNvPicPr>
+            <a:picLocks noChangeAspect="1"/>
+          </p:cNvPicPr>
+          <p:nvPr/>
+        </p:nvPicPr>
+        <p:blipFill>
+          <a:blip r:embed="rId2"/>
+          <a:stretch>
+            <a:fillRect/>
+          </a:stretch>
+        </p:blipFill>
+        <p:spPr>
+          <a:xfrm>
+            <a:off x="5943600" y="1828800"/>
+            <a:ext cx="5760720" cy="3600450"/>
+          </a:xfrm>
+          <a:prstGeom prst="rect">
+            <a:avLst/>
+          </a:prstGeom>
+        </p:spPr>
+      </p:pic>
+    </p:spTree>
+  </p:cSld>
+  <p:clrMapOvr>
+    <a:masterClrMapping/>
+  </p:clrMapOvr>
+</p:sld>
+</file>
+
+<file path=ppt/slides/slide19.xml><?xml version="1.0" encoding="utf-8"?>
+<p:sld xmlns:a="http://schemas.openxmlformats.org/drawingml/2006/main" xmlns:p="http://schemas.openxmlformats.org/presentationml/2006/main" xmlns:r="http://schemas.openxmlformats.org/officeDocument/2006/relationships">
+  <p:cSld>
+    <p:spTree>
+      <p:nvGrpSpPr>
+        <p:cNvPr id="1" name=""/>
+        <p:cNvGrpSpPr/>
+        <p:nvPr/>
+      </p:nvGrpSpPr>
+      <p:grpSpPr/>
+      <p:sp>
+        <p:nvSpPr>
+          <p:cNvPr id="2" name="Rectangle 1"/>
+          <p:cNvSpPr/>
+          <p:nvPr/>
+        </p:nvSpPr>
+        <p:spPr>
+          <a:xfrm>
+            <a:off x="0" y="0"/>
+            <a:ext cx="12191695" cy="6858000"/>
+          </a:xfrm>
+          <a:prstGeom prst="rect">
+            <a:avLst/>
+          </a:prstGeom>
+          <a:solidFill>
+            <a:srgbClr val="F7F6F1"/>
+          </a:solidFill>
+          <a:ln>
+            <a:noFill/>
+          </a:ln>
+          <a:effectLst/>
+        </p:spPr>
+        <p:style>
+          <a:lnRef idx="1">
+            <a:schemeClr val="accent1"/>
+          </a:lnRef>
+          <a:fillRef idx="3">
+            <a:schemeClr val="accent1"/>
+          </a:fillRef>
+          <a:effectRef idx="2">
+            <a:schemeClr val="accent1"/>
+          </a:effectRef>
+          <a:fontRef idx="minor">
+            <a:schemeClr val="lt1"/>
+          </a:fontRef>
+        </p:style>
+        <p:txBody>
+          <a:bodyPr rtlCol="0" anchor="ctr"/>
+          <a:lstStyle/>
+          <a:p>
+            <a:pPr algn="ctr"/>
+          </a:p>
+        </p:txBody>
+      </p:sp>
+      <p:sp>
+        <p:nvSpPr>
+          <p:cNvPr id="3" name="TextBox 2"/>
+          <p:cNvSpPr txBox="1"/>
+          <p:nvPr/>
+        </p:nvSpPr>
+        <p:spPr>
+          <a:xfrm>
+            <a:off x="640080" y="365760"/>
+            <a:ext cx="10972800" cy="365760"/>
+          </a:xfrm>
+          <a:prstGeom prst="rect">
+            <a:avLst/>
+          </a:prstGeom>
+          <a:noFill/>
+        </p:spPr>
+        <p:txBody>
+          <a:bodyPr wrap="square">
+            <a:spAutoFit/>
+          </a:bodyPr>
+          <a:lstStyle/>
+          <a:p>
+            <a:r>
+              <a:rPr sz="1100" b="1">
+                <a:solidFill>
+                  <a:srgbClr val="C8A24B"/>
+                </a:solidFill>
+              </a:rPr>
+              <a:t>НАЧАЛО РАБОТЫ</a:t>
+            </a:r>
+          </a:p>
+        </p:txBody>
+      </p:sp>
+      <p:sp>
+        <p:nvSpPr>
+          <p:cNvPr id="4" name="Rectangle 3"/>
+          <p:cNvSpPr/>
+          <p:nvPr/>
+        </p:nvSpPr>
+        <p:spPr>
+          <a:xfrm>
+            <a:off x="640080" y="731520"/>
+            <a:ext cx="10881360" cy="777240"/>
+          </a:xfrm>
+          <a:prstGeom prst="rect">
+            <a:avLst/>
+          </a:prstGeom>
+          <a:solidFill>
+            <a:srgbClr val="1F5D43"/>
+          </a:solidFill>
+          <a:ln>
+            <a:noFill/>
+          </a:ln>
+          <a:effectLst/>
+        </p:spPr>
+        <p:style>
+          <a:lnRef idx="1">
+            <a:schemeClr val="accent1"/>
+          </a:lnRef>
+          <a:fillRef idx="3">
+            <a:schemeClr val="accent1"/>
+          </a:fillRef>
+          <a:effectRef idx="2">
+            <a:schemeClr val="accent1"/>
+          </a:effectRef>
+          <a:fontRef idx="minor">
+            <a:schemeClr val="lt1"/>
+          </a:fontRef>
+        </p:style>
+        <p:txBody>
+          <a:bodyPr rtlCol="0" anchor="ctr" wrap="square"/>
+          <a:lstStyle/>
+          <a:p>
+            <a:pPr algn="l"/>
+            <a:r>
+              <a:rPr sz="2200" b="1">
+                <a:solidFill>
+                  <a:srgbClr val="FFFFFF"/>
+                </a:solidFill>
+              </a:rPr>
+              <a:t>   Начните с Factorio</a:t>
+            </a:r>
+          </a:p>
+        </p:txBody>
+      </p:sp>
+      <p:sp>
+        <p:nvSpPr>
+          <p:cNvPr id="5" name="TextBox 4"/>
+          <p:cNvSpPr txBox="1"/>
+          <p:nvPr/>
+        </p:nvSpPr>
+        <p:spPr>
+          <a:xfrm>
+            <a:off x="640080" y="1828800"/>
+            <a:ext cx="10881360" cy="4572000"/>
+          </a:xfrm>
+          <a:prstGeom prst="rect">
+            <a:avLst/>
+          </a:prstGeom>
+          <a:noFill/>
+        </p:spPr>
+        <p:txBody>
+          <a:bodyPr wrap="square">
+            <a:spAutoFit/>
+          </a:bodyPr>
+          <a:lstStyle/>
+          <a:p>
+            <a:pPr>
+              <a:spcAft>
+                <a:spcPts val="1000"/>
+              </a:spcAft>
+            </a:pPr>
+            <a:r>
+              <a:rPr sz="1500">
+                <a:solidFill>
+                  <a:srgbClr val="14231B"/>
+                </a:solidFill>
+              </a:rPr>
+              <a:t>•  Продавцам — подайте счёт и получите предложение за 1–3 рабочих дня.</a:t>
+            </a:r>
+          </a:p>
+          <a:p>
+            <a:pPr>
+              <a:spcAft>
+                <a:spcPts val="1000"/>
+              </a:spcAft>
+            </a:pPr>
+            <a:r>
+              <a:rPr sz="1500">
+                <a:solidFill>
+                  <a:srgbClr val="14231B"/>
+                </a:solidFill>
+              </a:rPr>
+              <a:t>•  Инвесторам — изучайте маркетплейс, формируйте портфель, автоматизируйте через авто-инвестирование.</a:t>
+            </a:r>
+          </a:p>
+          <a:p>
+            <a:pPr>
+              <a:spcAft>
+                <a:spcPts val="1000"/>
+              </a:spcAft>
+            </a:pPr>
+            <a:r>
+              <a:rPr sz="1500">
+                <a:solidFill>
+                  <a:srgbClr val="14231B"/>
+                </a:solidFill>
+              </a:rPr>
+              <a:t>•  Доступно на factorio.co.uk · hello@factorio.co.uk</a:t>
             </a:r>
           </a:p>
         </p:txBody>
@@ -6045,7 +6810,7 @@
                   <a:srgbClr val="C8A24B"/>
                 </a:solidFill>
               </a:rPr>
-              <a:t>ТАРИФЫ</a:t>
+              <a:t>КАК ДВИЖУТСЯ ДЕНЬГИ</a:t>
             </a:r>
           </a:p>
         </p:txBody>
@@ -6097,97 +6862,14 @@
                   <a:srgbClr val="FFFFFF"/>
                 </a:solidFill>
               </a:rPr>
-              <a:t>   Прозрачные тарифы за каждый счёт</a:t>
-            </a:r>
-          </a:p>
-        </p:txBody>
-      </p:sp>
-      <p:sp>
-        <p:nvSpPr>
-          <p:cNvPr id="5" name="TextBox 4"/>
-          <p:cNvSpPr txBox="1"/>
-          <p:nvPr/>
-        </p:nvSpPr>
-        <p:spPr>
-          <a:xfrm>
-            <a:off x="640080" y="1828800"/>
-            <a:ext cx="5120640" cy="4572000"/>
-          </a:xfrm>
-          <a:prstGeom prst="rect">
-            <a:avLst/>
-          </a:prstGeom>
-          <a:noFill/>
-        </p:spPr>
-        <p:txBody>
-          <a:bodyPr wrap="square">
-            <a:spAutoFit/>
-          </a:bodyPr>
-          <a:lstStyle/>
-          <a:p>
-            <a:pPr>
-              <a:spcAft>
-                <a:spcPts val="1000"/>
-              </a:spcAft>
-            </a:pPr>
-            <a:r>
-              <a:rPr sz="1500">
-                <a:solidFill>
-                  <a:srgbClr val="14231B"/>
-                </a:solidFill>
-              </a:rPr>
-              <a:t>•  Тариф рассчитывается за каждый счёт — комиссия за 30 дней от суммы аванса, без скрытых платежей.</a:t>
-            </a:r>
-          </a:p>
-          <a:p>
-            <a:pPr>
-              <a:spcAft>
-                <a:spcPts val="1000"/>
-              </a:spcAft>
-            </a:pPr>
-            <a:r>
-              <a:rPr sz="1500">
-                <a:solidFill>
-                  <a:srgbClr val="14231B"/>
-                </a:solidFill>
-              </a:rPr>
-              <a:t>•  Показаны базовая ставка аванса и наглядный пример расчёта.</a:t>
-            </a:r>
-          </a:p>
-          <a:p>
-            <a:pPr>
-              <a:spcAft>
-                <a:spcPts val="1000"/>
-              </a:spcAft>
-            </a:pPr>
-            <a:r>
-              <a:rPr sz="1500">
-                <a:solidFill>
-                  <a:srgbClr val="14231B"/>
-                </a:solidFill>
-              </a:rPr>
-              <a:t>•  Без подписки и без обязательств при подаче счёта.</a:t>
-            </a:r>
-          </a:p>
-          <a:p>
-            <a:pPr>
-              <a:spcAft>
-                <a:spcPts val="1000"/>
-              </a:spcAft>
-            </a:pPr>
-            <a:r>
-              <a:rPr sz="1500">
-                <a:solidFill>
-                  <a:srgbClr val="14231B"/>
-                </a:solidFill>
-              </a:rPr>
-              <a:t>•  Понятная разбивка, чтобы обе стороны видели доход и стоимость.</a:t>
+              <a:t>   Откуда каждая сторона получает деньги</a:t>
             </a:r>
           </a:p>
         </p:txBody>
       </p:sp>
       <p:pic>
         <p:nvPicPr>
-          <p:cNvPr id="6" name="Picture 5" descr="ru-05-pricing.png"/>
+          <p:cNvPr id="5" name="Picture 4" descr="ru-15-money-flow.png"/>
           <p:cNvPicPr>
             <a:picLocks noChangeAspect="1"/>
           </p:cNvPicPr>
@@ -6201,14 +6883,97 @@
         </p:blipFill>
         <p:spPr>
           <a:xfrm>
-            <a:off x="5943600" y="1828800"/>
-            <a:ext cx="5760720" cy="3600450"/>
+            <a:off x="1527048" y="1737360"/>
+            <a:ext cx="9144000" cy="2253498"/>
           </a:xfrm>
           <a:prstGeom prst="rect">
             <a:avLst/>
           </a:prstGeom>
         </p:spPr>
       </p:pic>
+      <p:sp>
+        <p:nvSpPr>
+          <p:cNvPr id="6" name="TextBox 5"/>
+          <p:cNvSpPr txBox="1"/>
+          <p:nvPr/>
+        </p:nvSpPr>
+        <p:spPr>
+          <a:xfrm>
+            <a:off x="640080" y="4663440"/>
+            <a:ext cx="10881360" cy="2011680"/>
+          </a:xfrm>
+          <a:prstGeom prst="rect">
+            <a:avLst/>
+          </a:prstGeom>
+          <a:noFill/>
+        </p:spPr>
+        <p:txBody>
+          <a:bodyPr wrap="square">
+            <a:spAutoFit/>
+          </a:bodyPr>
+          <a:lstStyle/>
+          <a:p>
+            <a:pPr>
+              <a:spcAft>
+                <a:spcPts val="600"/>
+              </a:spcAft>
+            </a:pPr>
+            <a:r>
+              <a:rPr sz="1300">
+                <a:solidFill>
+                  <a:srgbClr val="14231B"/>
+                </a:solidFill>
+              </a:rPr>
+              <a:t>•  Продавец поставляет товар и выставляет э-счёт в SoliqOnline; плательщик (дебитор) должен сумму счёта.</a:t>
+            </a:r>
+          </a:p>
+          <a:p>
+            <a:pPr>
+              <a:spcAft>
+                <a:spcPts val="600"/>
+              </a:spcAft>
+            </a:pPr>
+            <a:r>
+              <a:rPr sz="1300">
+                <a:solidFill>
+                  <a:srgbClr val="14231B"/>
+                </a:solidFill>
+              </a:rPr>
+              <a:t>•  Платформа выдаёт продавцу ~85% сразу, за счёт источника капитала — баланса банка, инвесторов или SPV в DIFC.</a:t>
+            </a:r>
+          </a:p>
+          <a:p>
+            <a:pPr>
+              <a:spcAft>
+                <a:spcPts val="600"/>
+              </a:spcAft>
+            </a:pPr>
+            <a:r>
+              <a:rPr sz="1300">
+                <a:solidFill>
+                  <a:srgbClr val="14231B"/>
+                </a:solidFill>
+              </a:rPr>
+              <a:t>•  В срок плательщик платит 100% на счёт сбора; продавец получает остаток, источник капитала — основную сумму и доход, платформа удерживает комиссию за объём.</a:t>
+            </a:r>
+          </a:p>
+          <a:p>
+            <a:pPr>
+              <a:spcAft>
+                <a:spcPts val="600"/>
+              </a:spcAft>
+            </a:pPr>
+            <a:r>
+              <a:rPr sz="1300">
+                <a:solidFill>
+                  <a:srgbClr val="14231B"/>
+                </a:solidFill>
+              </a:rPr>
+              <a:t>•  Поток одинаков независимо от того, кто финансирует — именно поэтому слой инвесторов / SPV подключаемый.</a:t>
+            </a:r>
+          </a:p>
+        </p:txBody>
+      </p:sp>
     </p:spTree>
   </p:cSld>
   <p:clrMapOvr>
@@ -6299,7 +7064,7 @@
                   <a:srgbClr val="C8A24B"/>
                 </a:solidFill>
               </a:rPr>
-              <a:t>КОНТАКТЫ</a:t>
+              <a:t>ПУТЬ · ЗАЁМЩИК (ORIGINATION)</a:t>
             </a:r>
           </a:p>
         </p:txBody>
@@ -6351,82 +7116,14 @@
                   <a:srgbClr val="FFFFFF"/>
                 </a:solidFill>
               </a:rPr>
-              <a:t>   Связаться с нами</a:t>
-            </a:r>
-          </a:p>
-        </p:txBody>
-      </p:sp>
-      <p:sp>
-        <p:nvSpPr>
-          <p:cNvPr id="5" name="TextBox 4"/>
-          <p:cNvSpPr txBox="1"/>
-          <p:nvPr/>
-        </p:nvSpPr>
-        <p:spPr>
-          <a:xfrm>
-            <a:off x="640080" y="1828800"/>
-            <a:ext cx="5120640" cy="4572000"/>
-          </a:xfrm>
-          <a:prstGeom prst="rect">
-            <a:avLst/>
-          </a:prstGeom>
-          <a:noFill/>
-        </p:spPr>
-        <p:txBody>
-          <a:bodyPr wrap="square">
-            <a:spAutoFit/>
-          </a:bodyPr>
-          <a:lstStyle/>
-          <a:p>
-            <a:pPr>
-              <a:spcAft>
-                <a:spcPts val="1000"/>
-              </a:spcAft>
-            </a:pPr>
-            <a:r>
-              <a:rPr sz="1500">
-                <a:solidFill>
-                  <a:srgbClr val="14231B"/>
-                </a:solidFill>
-              </a:rPr>
-              <a:t>•  Страница контактов для продавцов и инвесторов, чтобы связаться с командой Factorio.</a:t>
-            </a:r>
-          </a:p>
-          <a:p>
-            <a:pPr>
-              <a:spcAft>
-                <a:spcPts val="1000"/>
-              </a:spcAft>
-            </a:pPr>
-            <a:r>
-              <a:rPr sz="1500">
-                <a:solidFill>
-                  <a:srgbClr val="14231B"/>
-                </a:solidFill>
-              </a:rPr>
-              <a:t>•  Показаны контактный e-mail и простая форма обращения.</a:t>
-            </a:r>
-          </a:p>
-          <a:p>
-            <a:pPr>
-              <a:spcAft>
-                <a:spcPts val="1000"/>
-              </a:spcAft>
-            </a:pPr>
-            <a:r>
-              <a:rPr sz="1500">
-                <a:solidFill>
-                  <a:srgbClr val="14231B"/>
-                </a:solidFill>
-              </a:rPr>
-              <a:t>•  Точка входа для начала подключения.</a:t>
+              <a:t>   Путь продавца, от начала до конца</a:t>
             </a:r>
           </a:p>
         </p:txBody>
       </p:sp>
       <p:pic>
         <p:nvPicPr>
-          <p:cNvPr id="6" name="Picture 5" descr="ru-06-contact.png"/>
+          <p:cNvPr id="5" name="Picture 4" descr="ru-16-origination-journey.png"/>
           <p:cNvPicPr>
             <a:picLocks noChangeAspect="1"/>
           </p:cNvPicPr>
@@ -6440,14 +7137,82 @@
         </p:blipFill>
         <p:spPr>
           <a:xfrm>
-            <a:off x="5943600" y="1828800"/>
-            <a:ext cx="5760720" cy="3600450"/>
+            <a:off x="1527048" y="1737360"/>
+            <a:ext cx="9144000" cy="460630"/>
           </a:xfrm>
           <a:prstGeom prst="rect">
             <a:avLst/>
           </a:prstGeom>
         </p:spPr>
       </p:pic>
+      <p:sp>
+        <p:nvSpPr>
+          <p:cNvPr id="6" name="TextBox 5"/>
+          <p:cNvSpPr txBox="1"/>
+          <p:nvPr/>
+        </p:nvSpPr>
+        <p:spPr>
+          <a:xfrm>
+            <a:off x="640080" y="4663440"/>
+            <a:ext cx="10881360" cy="2011680"/>
+          </a:xfrm>
+          <a:prstGeom prst="rect">
+            <a:avLst/>
+          </a:prstGeom>
+          <a:noFill/>
+        </p:spPr>
+        <p:txBody>
+          <a:bodyPr wrap="square">
+            <a:spAutoFit/>
+          </a:bodyPr>
+          <a:lstStyle/>
+          <a:p>
+            <a:pPr>
+              <a:spcAft>
+                <a:spcPts val="600"/>
+              </a:spcAft>
+            </a:pPr>
+            <a:r>
+              <a:rPr sz="1300">
+                <a:solidFill>
+                  <a:srgbClr val="14231B"/>
+                </a:solidFill>
+              </a:rPr>
+              <a:t>•  Регистрация (KYC банка) → счёт импортируется из SoliqOnline → запрос финансирования в чате AI-триажа.</a:t>
+            </a:r>
+          </a:p>
+          <a:p>
+            <a:pPr>
+              <a:spcAft>
+                <a:spcPts val="600"/>
+              </a:spcAft>
+            </a:pPr>
+            <a:r>
+              <a:rPr sz="1300">
+                <a:solidFill>
+                  <a:srgbClr val="14231B"/>
+                </a:solidFill>
+              </a:rPr>
+              <a:t>•  Скоринг дебитора возвращает индикативные условия; банк одобряет в один клик; залог регистрируется в ЦБ менее чем за час.</a:t>
+            </a:r>
+          </a:p>
+          <a:p>
+            <a:pPr>
+              <a:spcAft>
+                <a:spcPts val="600"/>
+              </a:spcAft>
+            </a:pPr>
+            <a:r>
+              <a:rPr sz="1300">
+                <a:solidFill>
+                  <a:srgbClr val="14231B"/>
+                </a:solidFill>
+              </a:rPr>
+              <a:t>•  Аванс поступает на счёт продавца за 24–48 часов — без визита в отделение и без бумаг.</a:t>
+            </a:r>
+          </a:p>
+        </p:txBody>
+      </p:sp>
     </p:spTree>
   </p:cSld>
   <p:clrMapOvr>
@@ -6538,7 +7303,7 @@
                   <a:srgbClr val="C8A24B"/>
                 </a:solidFill>
               </a:rPr>
-              <a:t>ПРИЛОЖЕНИЕ · ДАШБОРД</a:t>
+              <a:t>ПУТЬ · ИНВЕСТОР</a:t>
             </a:r>
           </a:p>
         </p:txBody>
@@ -6590,112 +7355,14 @@
                   <a:srgbClr val="FFFFFF"/>
                 </a:solidFill>
               </a:rPr>
-              <a:t>   Ваш персональный обзор</a:t>
-            </a:r>
-          </a:p>
-        </p:txBody>
-      </p:sp>
-      <p:sp>
-        <p:nvSpPr>
-          <p:cNvPr id="5" name="TextBox 4"/>
-          <p:cNvSpPr txBox="1"/>
-          <p:nvPr/>
-        </p:nvSpPr>
-        <p:spPr>
-          <a:xfrm>
-            <a:off x="640080" y="1828800"/>
-            <a:ext cx="5120640" cy="4572000"/>
-          </a:xfrm>
-          <a:prstGeom prst="rect">
-            <a:avLst/>
-          </a:prstGeom>
-          <a:noFill/>
-        </p:spPr>
-        <p:txBody>
-          <a:bodyPr wrap="square">
-            <a:spAutoFit/>
-          </a:bodyPr>
-          <a:lstStyle/>
-          <a:p>
-            <a:pPr>
-              <a:spcAft>
-                <a:spcPts val="1000"/>
-              </a:spcAft>
-            </a:pPr>
-            <a:r>
-              <a:rPr sz="1500">
-                <a:solidFill>
-                  <a:srgbClr val="14231B"/>
-                </a:solidFill>
-              </a:rPr>
-              <a:t>•  Главная /app приветствует текущего инвестора и показывает его KPI: стоимость портфеля, чистую годовую доходность, заработанное и ближайший расчёт.</a:t>
-            </a:r>
-          </a:p>
-          <a:p>
-            <a:pPr>
-              <a:spcAft>
-                <a:spcPts val="1000"/>
-              </a:spcAft>
-            </a:pPr>
-            <a:r>
-              <a:rPr sz="1500">
-                <a:solidFill>
-                  <a:srgbClr val="14231B"/>
-                </a:solidFill>
-              </a:rPr>
-              <a:t>•  Лента активности отражает уведомления — финансирования, расчёты и обновления.</a:t>
-            </a:r>
-          </a:p>
-          <a:p>
-            <a:pPr>
-              <a:spcAft>
-                <a:spcPts val="1000"/>
-              </a:spcAft>
-            </a:pPr>
-            <a:r>
-              <a:rPr sz="1500">
-                <a:solidFill>
-                  <a:srgbClr val="14231B"/>
-                </a:solidFill>
-              </a:rPr>
-              <a:t>•  Быстрые действия ведут в маркетплейс, портфель и выписку.</a:t>
-            </a:r>
-          </a:p>
-          <a:p>
-            <a:pPr>
-              <a:spcAft>
-                <a:spcPts val="1000"/>
-              </a:spcAft>
-            </a:pPr>
-            <a:r>
-              <a:rPr sz="1500">
-                <a:solidFill>
-                  <a:srgbClr val="14231B"/>
-                </a:solidFill>
-              </a:rPr>
-              <a:t>•  Общая статистика платформы вынесена во вторичную полосу.</a:t>
-            </a:r>
-          </a:p>
-          <a:p>
-            <a:pPr>
-              <a:spcAft>
-                <a:spcPts val="1000"/>
-              </a:spcAft>
-            </a:pPr>
-            <a:r>
-              <a:rPr sz="1500">
-                <a:solidFill>
-                  <a:srgbClr val="14231B"/>
-                </a:solidFill>
-              </a:rPr>
-              <a:t>•  Переключатель инвестора справа вверху позволяет смотреть приложение от лица любого инвестора (демо, без пароля).</a:t>
+              <a:t>   Путь инвестора, от начала до конца</a:t>
             </a:r>
           </a:p>
         </p:txBody>
       </p:sp>
       <p:pic>
         <p:nvPicPr>
-          <p:cNvPr id="6" name="Picture 5" descr="ru-07-dashboard.png"/>
+          <p:cNvPr id="5" name="Picture 4" descr="ru-17-investor-journey.png"/>
           <p:cNvPicPr>
             <a:picLocks noChangeAspect="1"/>
           </p:cNvPicPr>
@@ -6709,14 +7376,82 @@
         </p:blipFill>
         <p:spPr>
           <a:xfrm>
-            <a:off x="5943600" y="1828800"/>
-            <a:ext cx="5760720" cy="3600450"/>
+            <a:off x="1527048" y="1737360"/>
+            <a:ext cx="9144000" cy="564000"/>
           </a:xfrm>
           <a:prstGeom prst="rect">
             <a:avLst/>
           </a:prstGeom>
         </p:spPr>
       </p:pic>
+      <p:sp>
+        <p:nvSpPr>
+          <p:cNvPr id="6" name="TextBox 5"/>
+          <p:cNvSpPr txBox="1"/>
+          <p:nvPr/>
+        </p:nvSpPr>
+        <p:spPr>
+          <a:xfrm>
+            <a:off x="640080" y="4663440"/>
+            <a:ext cx="10881360" cy="2011680"/>
+          </a:xfrm>
+          <a:prstGeom prst="rect">
+            <a:avLst/>
+          </a:prstGeom>
+          <a:noFill/>
+        </p:spPr>
+        <p:txBody>
+          <a:bodyPr wrap="square">
+            <a:spAutoFit/>
+          </a:bodyPr>
+          <a:lstStyle/>
+          <a:p>
+            <a:pPr>
+              <a:spcAft>
+                <a:spcPts val="600"/>
+              </a:spcAft>
+            </a:pPr>
+            <a:r>
+              <a:rPr sz="1300">
+                <a:solidFill>
+                  <a:srgbClr val="14231B"/>
+                </a:solidFill>
+              </a:rPr>
+              <a:t>•  Онбординг (KYC / аккредитация) → внесение капитала через маркетплейс или SPV → автоинвест или выбор счетов.</a:t>
+            </a:r>
+          </a:p>
+          <a:p>
+            <a:pPr>
+              <a:spcAft>
+                <a:spcPts val="600"/>
+              </a:spcAft>
+            </a:pPr>
+            <a:r>
+              <a:rPr sz="1300">
+                <a:solidFill>
+                  <a:srgbClr val="14231B"/>
+                </a:solidFill>
+              </a:rPr>
+              <a:t>•  Позиция удерживается с AI-отчётностью по запросу; когда дебитор платит в срок, распределяются основная сумма и доход.</a:t>
+            </a:r>
+          </a:p>
+          <a:p>
+            <a:pPr>
+              <a:spcAft>
+                <a:spcPts val="600"/>
+              </a:spcAft>
+            </a:pPr>
+            <a:r>
+              <a:rPr sz="1300">
+                <a:solidFill>
+                  <a:srgbClr val="14231B"/>
+                </a:solidFill>
+              </a:rPr>
+              <a:t>•  Декомпозируемо: часть origination (за счёт банка) можно запустить первой; маркетплейс инвесторов и SPV подключаются позже, независимо.</a:t>
+            </a:r>
+          </a:p>
+        </p:txBody>
+      </p:sp>
     </p:spTree>
   </p:cSld>
   <p:clrMapOvr>
@@ -6807,7 +7542,7 @@
                   <a:srgbClr val="C8A24B"/>
                 </a:solidFill>
               </a:rPr>
-              <a:t>ПРИЛОЖЕНИЕ · МАРКЕТПЛЕЙС</a:t>
+              <a:t>ТАРИФЫ</a:t>
             </a:r>
           </a:p>
         </p:txBody>
@@ -6859,7 +7594,7 @@
                   <a:srgbClr val="FFFFFF"/>
                 </a:solidFill>
               </a:rPr>
-              <a:t>   Просмотр счетов для финансирования</a:t>
+              <a:t>   Прозрачные тарифы за каждый счёт</a:t>
             </a:r>
           </a:p>
         </p:txBody>
@@ -6897,7 +7632,7 @@
                   <a:srgbClr val="14231B"/>
                 </a:solidFill>
               </a:rPr>
-              <a:t>•  Каждый открытый счёт — это карточка: должник, отрасль, рейтинг риска, сумма и шкала прогресса финансирования.</a:t>
+              <a:t>•  Тариф рассчитывается за каждый счёт — комиссия за 30 дней от суммы аванса, без скрытых платежей.</a:t>
             </a:r>
           </a:p>
           <a:p>
@@ -6912,7 +7647,7 @@
                   <a:srgbClr val="14231B"/>
                 </a:solidFill>
               </a:rPr>
-              <a:t>•  На карточке видны ключевые показатели — ставка аванса, комиссия за 30 дней и ожидаемая доходность — а также срок удержания в днях.</a:t>
+              <a:t>•  Показаны базовая ставка аванса и наглядный пример расчёта.</a:t>
             </a:r>
           </a:p>
           <a:p>
@@ -6927,7 +7662,7 @@
                   <a:srgbClr val="14231B"/>
                 </a:solidFill>
               </a:rPr>
-              <a:t>•  Панель фильтров сужает выбор по отрасли, рейтингу риска, максимальному сроку и минимальной доходности.</a:t>
+              <a:t>•  Без подписки и без обязательств при подаче счёта.</a:t>
             </a:r>
           </a:p>
           <a:p>
@@ -6942,14 +7677,14 @@
                   <a:srgbClr val="14231B"/>
                 </a:solidFill>
               </a:rPr>
-              <a:t>•  Нажмите на карточку, чтобы открыть подробности счёта.</a:t>
+              <a:t>•  Понятная разбивка, чтобы обе стороны видели доход и стоимость.</a:t>
             </a:r>
           </a:p>
         </p:txBody>
       </p:sp>
       <p:pic>
         <p:nvPicPr>
-          <p:cNvPr id="6" name="Picture 5" descr="ru-08-marketplace.png"/>
+          <p:cNvPr id="6" name="Picture 5" descr="ru-05-pricing.png"/>
           <p:cNvPicPr>
             <a:picLocks noChangeAspect="1"/>
           </p:cNvPicPr>
